--- a/VGG8/vgg8.pptx
+++ b/VGG8/vgg8.pptx
@@ -13,6 +13,7 @@
     <p:sldId id="258" r:id="rId8"/>
     <p:sldId id="259" r:id="rId9"/>
     <p:sldId id="260" r:id="rId10"/>
+    <p:sldId id="261" r:id="rId11"/>
   </p:sldIdLst>
   <p:sldSz cy="5143500" cx="9144000"/>
   <p:notesSz cx="6858000" cy="9144000"/>
@@ -808,7 +809,7 @@
       </p:grpSpPr>
       <p:sp>
         <p:nvSpPr>
-          <p:cNvPr id="58" name="Google Shape;58;g2f94bd42d51_0_3:notes"/>
+          <p:cNvPr id="58" name="Google Shape;58;g30b100a6079_0_0:notes"/>
           <p:cNvSpPr/>
           <p:nvPr>
             <p:ph idx="2" type="sldImg"/>
@@ -843,7 +844,7 @@
       </p:sp>
       <p:sp>
         <p:nvSpPr>
-          <p:cNvPr id="59" name="Google Shape;59;g2f94bd42d51_0_3:notes"/>
+          <p:cNvPr id="59" name="Google Shape;59;g30b100a6079_0_0:notes"/>
           <p:cNvSpPr txBox="1"/>
           <p:nvPr>
             <p:ph idx="1" type="body"/>
@@ -907,7 +908,7 @@
       </p:grpSpPr>
       <p:sp>
         <p:nvSpPr>
-          <p:cNvPr id="64" name="Google Shape;64;g2f94bd42d51_0_9:notes"/>
+          <p:cNvPr id="64" name="Google Shape;64;g2f94bd42d51_0_3:notes"/>
           <p:cNvSpPr/>
           <p:nvPr>
             <p:ph idx="2" type="sldImg"/>
@@ -942,7 +943,7 @@
       </p:sp>
       <p:sp>
         <p:nvSpPr>
-          <p:cNvPr id="65" name="Google Shape;65;g2f94bd42d51_0_9:notes"/>
+          <p:cNvPr id="65" name="Google Shape;65;g2f94bd42d51_0_3:notes"/>
           <p:cNvSpPr txBox="1"/>
           <p:nvPr>
             <p:ph idx="1" type="body"/>
@@ -1006,7 +1007,7 @@
       </p:grpSpPr>
       <p:sp>
         <p:nvSpPr>
-          <p:cNvPr id="70" name="Google Shape;70;g2f94bd42d51_0_16:notes"/>
+          <p:cNvPr id="70" name="Google Shape;70;g2f94bd42d51_0_9:notes"/>
           <p:cNvSpPr/>
           <p:nvPr>
             <p:ph idx="2" type="sldImg"/>
@@ -1041,7 +1042,7 @@
       </p:sp>
       <p:sp>
         <p:nvSpPr>
-          <p:cNvPr id="71" name="Google Shape;71;g2f94bd42d51_0_16:notes"/>
+          <p:cNvPr id="71" name="Google Shape;71;g2f94bd42d51_0_9:notes"/>
           <p:cNvSpPr txBox="1"/>
           <p:nvPr>
             <p:ph idx="1" type="body"/>
@@ -1105,7 +1106,7 @@
       </p:grpSpPr>
       <p:sp>
         <p:nvSpPr>
-          <p:cNvPr id="76" name="Google Shape;76;g2f94bd42d51_0_22:notes"/>
+          <p:cNvPr id="76" name="Google Shape;76;g2f94bd42d51_0_16:notes"/>
           <p:cNvSpPr/>
           <p:nvPr>
             <p:ph idx="2" type="sldImg"/>
@@ -1140,7 +1141,106 @@
       </p:sp>
       <p:sp>
         <p:nvSpPr>
-          <p:cNvPr id="77" name="Google Shape;77;g2f94bd42d51_0_22:notes"/>
+          <p:cNvPr id="77" name="Google Shape;77;g2f94bd42d51_0_16:notes"/>
+          <p:cNvSpPr txBox="1"/>
+          <p:nvPr>
+            <p:ph idx="1" type="body"/>
+          </p:nvPr>
+        </p:nvSpPr>
+        <p:spPr>
+          <a:xfrm>
+            <a:off x="685800" y="4343400"/>
+            <a:ext cx="5486400" cy="4114800"/>
+          </a:xfrm>
+          <a:prstGeom prst="rect">
+            <a:avLst/>
+          </a:prstGeom>
+        </p:spPr>
+        <p:txBody>
+          <a:bodyPr anchorCtr="0" anchor="t" bIns="91425" lIns="91425" spcFirstLastPara="1" rIns="91425" wrap="square" tIns="91425">
+            <a:noAutofit/>
+          </a:bodyPr>
+          <a:lstStyle/>
+          <a:p>
+            <a:pPr indent="0" lvl="0" marL="0" rtl="0" algn="l">
+              <a:spcBef>
+                <a:spcPts val="0"/>
+              </a:spcBef>
+              <a:spcAft>
+                <a:spcPts val="0"/>
+              </a:spcAft>
+              <a:buNone/>
+            </a:pPr>
+            <a:r>
+              <a:t/>
+            </a:r>
+            <a:endParaRPr/>
+          </a:p>
+        </p:txBody>
+      </p:sp>
+    </p:spTree>
+  </p:cSld>
+  <p:clrMapOvr>
+    <a:masterClrMapping/>
+  </p:clrMapOvr>
+</p:notes>
+</file>
+
+<file path=ppt/notesSlides/notesSlide6.xml><?xml version="1.0" encoding="utf-8"?>
+<p:notes xmlns:a="http://schemas.openxmlformats.org/drawingml/2006/main" xmlns:r="http://schemas.openxmlformats.org/officeDocument/2006/relationships" xmlns:mc="http://schemas.openxmlformats.org/markup-compatibility/2006" xmlns:mv="urn:schemas-microsoft-com:mac:vml" xmlns:p="http://schemas.openxmlformats.org/presentationml/2006/main" xmlns:c="http://schemas.openxmlformats.org/drawingml/2006/chart" xmlns:dgm="http://schemas.openxmlformats.org/drawingml/2006/diagram" xmlns:o="urn:schemas-microsoft-com:office:office" xmlns:v="urn:schemas-microsoft-com:vml" xmlns:pvml="urn:schemas-microsoft-com:office:powerpoint" xmlns:com="http://schemas.openxmlformats.org/drawingml/2006/compatibility" xmlns:p14="http://schemas.microsoft.com/office/powerpoint/2010/main" xmlns:p15="http://schemas.microsoft.com/office/powerpoint/2012/main" xmlns:ahyp="http://schemas.microsoft.com/office/drawing/2018/hyperlinkcolor" showMasterPhAnim="0" showMasterSp="0">
+  <p:cSld>
+    <p:spTree>
+      <p:nvGrpSpPr>
+        <p:cNvPr id="81" name="Shape 81"/>
+        <p:cNvGrpSpPr/>
+        <p:nvPr/>
+      </p:nvGrpSpPr>
+      <p:grpSpPr>
+        <a:xfrm>
+          <a:off x="0" y="0"/>
+          <a:ext cx="0" cy="0"/>
+          <a:chOff x="0" y="0"/>
+          <a:chExt cx="0" cy="0"/>
+        </a:xfrm>
+      </p:grpSpPr>
+      <p:sp>
+        <p:nvSpPr>
+          <p:cNvPr id="82" name="Google Shape;82;g2f94bd42d51_0_22:notes"/>
+          <p:cNvSpPr/>
+          <p:nvPr>
+            <p:ph idx="2" type="sldImg"/>
+          </p:nvPr>
+        </p:nvSpPr>
+        <p:spPr>
+          <a:xfrm>
+            <a:off x="381300" y="685800"/>
+            <a:ext cx="6096000" cy="3429000"/>
+          </a:xfrm>
+          <a:custGeom>
+            <a:rect b="b" l="l" r="r" t="t"/>
+            <a:pathLst>
+              <a:path extrusionOk="0" h="120000" w="120000">
+                <a:moveTo>
+                  <a:pt x="0" y="0"/>
+                </a:moveTo>
+                <a:lnTo>
+                  <a:pt x="120000" y="0"/>
+                </a:lnTo>
+                <a:lnTo>
+                  <a:pt x="120000" y="120000"/>
+                </a:lnTo>
+                <a:lnTo>
+                  <a:pt x="0" y="120000"/>
+                </a:lnTo>
+                <a:close/>
+              </a:path>
+            </a:pathLst>
+          </a:custGeom>
+        </p:spPr>
+      </p:sp>
+      <p:sp>
+        <p:nvSpPr>
+          <p:cNvPr id="83" name="Google Shape;83;g2f94bd42d51_0_22:notes"/>
           <p:cNvSpPr txBox="1"/>
           <p:nvPr>
             <p:ph idx="1" type="body"/>
@@ -6023,13 +6123,13 @@
           <p:cNvPr id="61" name="Google Shape;61;p14"/>
           <p:cNvSpPr txBox="1"/>
           <p:nvPr>
-            <p:ph type="title"/>
+            <p:ph idx="1" type="subTitle"/>
           </p:nvPr>
         </p:nvSpPr>
         <p:spPr>
           <a:xfrm>
-            <a:off x="311700" y="445025"/>
-            <a:ext cx="8520600" cy="572700"/>
+            <a:off x="311700" y="168550"/>
+            <a:ext cx="8520600" cy="792600"/>
           </a:xfrm>
           <a:prstGeom prst="rect">
             <a:avLst/>
@@ -6037,7 +6137,7 @@
         </p:spPr>
         <p:txBody>
           <a:bodyPr anchorCtr="0" anchor="t" bIns="91425" lIns="91425" spcFirstLastPara="1" rIns="91425" wrap="square" tIns="91425">
-            <a:noAutofit/>
+            <a:normAutofit/>
           </a:bodyPr>
           <a:lstStyle/>
           <a:p>
@@ -6048,17 +6148,13 @@
               <a:spcAft>
                 <a:spcPts val="0"/>
               </a:spcAft>
-              <a:buSzPts val="990"/>
               <a:buNone/>
             </a:pPr>
             <a:r>
-              <a:rPr lang="en" sz="1420"/>
-              <a:t>Weight Distribution of Base line model is already zero mean (except for classifier) so we take Z(zero-point = 0)</a:t>
+              <a:rPr lang="en"/>
+              <a:t>VGG8_Arch</a:t>
             </a:r>
-            <a:br>
-              <a:rPr lang="en" sz="1420"/>
-            </a:br>
-            <a:endParaRPr sz="1420"/>
+            <a:endParaRPr/>
           </a:p>
         </p:txBody>
       </p:sp>
@@ -6078,8 +6174,8 @@
         </p:blipFill>
         <p:spPr>
           <a:xfrm>
-            <a:off x="1431250" y="1017725"/>
-            <a:ext cx="5982150" cy="3589300"/>
+            <a:off x="1181100" y="1055800"/>
+            <a:ext cx="6781800" cy="2543175"/>
           </a:xfrm>
           <a:prstGeom prst="rect">
             <a:avLst/>
@@ -6134,7 +6230,7 @@
         </p:spPr>
         <p:txBody>
           <a:bodyPr anchorCtr="0" anchor="t" bIns="91425" lIns="91425" spcFirstLastPara="1" rIns="91425" wrap="square" tIns="91425">
-            <a:normAutofit fontScale="90000"/>
+            <a:noAutofit/>
           </a:bodyPr>
           <a:lstStyle/>
           <a:p>
@@ -6145,13 +6241,17 @@
               <a:spcAft>
                 <a:spcPts val="0"/>
               </a:spcAft>
+              <a:buSzPts val="990"/>
               <a:buNone/>
             </a:pPr>
             <a:r>
-              <a:rPr lang="en"/>
-              <a:t>Size VS Bit </a:t>
+              <a:rPr lang="en" sz="1420"/>
+              <a:t>Weight Distribution of Base line model is already zero mean (except for classifier) so we take Z(zero-point = 0)</a:t>
             </a:r>
-            <a:endParaRPr/>
+            <a:br>
+              <a:rPr lang="en" sz="1420"/>
+            </a:br>
+            <a:endParaRPr sz="1420"/>
           </a:p>
         </p:txBody>
       </p:sp>
@@ -6171,8 +6271,8 @@
         </p:blipFill>
         <p:spPr>
           <a:xfrm>
-            <a:off x="2024675" y="986650"/>
-            <a:ext cx="5094634" cy="3820976"/>
+            <a:off x="1431250" y="1017725"/>
+            <a:ext cx="5982150" cy="3589300"/>
           </a:xfrm>
           <a:prstGeom prst="rect">
             <a:avLst/>
@@ -6227,7 +6327,7 @@
         </p:spPr>
         <p:txBody>
           <a:bodyPr anchorCtr="0" anchor="t" bIns="91425" lIns="91425" spcFirstLastPara="1" rIns="91425" wrap="square" tIns="91425">
-            <a:normAutofit/>
+            <a:normAutofit fontScale="90000"/>
           </a:bodyPr>
           <a:lstStyle/>
           <a:p>
@@ -6238,14 +6338,13 @@
               <a:spcAft>
                 <a:spcPts val="0"/>
               </a:spcAft>
-              <a:buSzPts val="990"/>
               <a:buNone/>
             </a:pPr>
             <a:r>
-              <a:rPr lang="en" sz="2220"/>
-              <a:t>Accuracy_Size_Bits Graph</a:t>
+              <a:rPr lang="en"/>
+              <a:t>Size VS Bit </a:t>
             </a:r>
-            <a:endParaRPr sz="2220"/>
+            <a:endParaRPr/>
           </a:p>
         </p:txBody>
       </p:sp>
@@ -6265,7 +6364,7 @@
         </p:blipFill>
         <p:spPr>
           <a:xfrm>
-            <a:off x="2024688" y="991625"/>
+            <a:off x="2024675" y="986650"/>
             <a:ext cx="5094634" cy="3820976"/>
           </a:xfrm>
           <a:prstGeom prst="rect">
@@ -6321,6 +6420,100 @@
         </p:spPr>
         <p:txBody>
           <a:bodyPr anchorCtr="0" anchor="t" bIns="91425" lIns="91425" spcFirstLastPara="1" rIns="91425" wrap="square" tIns="91425">
+            <a:normAutofit/>
+          </a:bodyPr>
+          <a:lstStyle/>
+          <a:p>
+            <a:pPr indent="0" lvl="0" marL="0" rtl="0" algn="ctr">
+              <a:spcBef>
+                <a:spcPts val="0"/>
+              </a:spcBef>
+              <a:spcAft>
+                <a:spcPts val="0"/>
+              </a:spcAft>
+              <a:buSzPts val="990"/>
+              <a:buNone/>
+            </a:pPr>
+            <a:r>
+              <a:rPr lang="en" sz="2220"/>
+              <a:t>Accuracy_Size_Bits Graph</a:t>
+            </a:r>
+            <a:endParaRPr sz="2220"/>
+          </a:p>
+        </p:txBody>
+      </p:sp>
+      <p:pic>
+        <p:nvPicPr>
+          <p:cNvPr id="80" name="Google Shape;80;p17"/>
+          <p:cNvPicPr preferRelativeResize="0"/>
+          <p:nvPr/>
+        </p:nvPicPr>
+        <p:blipFill>
+          <a:blip r:embed="rId3">
+            <a:alphaModFix/>
+          </a:blip>
+          <a:stretch>
+            <a:fillRect/>
+          </a:stretch>
+        </p:blipFill>
+        <p:spPr>
+          <a:xfrm>
+            <a:off x="2024688" y="991625"/>
+            <a:ext cx="5094634" cy="3820976"/>
+          </a:xfrm>
+          <a:prstGeom prst="rect">
+            <a:avLst/>
+          </a:prstGeom>
+          <a:noFill/>
+          <a:ln>
+            <a:noFill/>
+          </a:ln>
+        </p:spPr>
+      </p:pic>
+    </p:spTree>
+  </p:cSld>
+  <p:clrMapOvr>
+    <a:masterClrMapping/>
+  </p:clrMapOvr>
+</p:sld>
+</file>
+
+<file path=ppt/slides/slide6.xml><?xml version="1.0" encoding="utf-8"?>
+<p:sld xmlns:a="http://schemas.openxmlformats.org/drawingml/2006/main" xmlns:r="http://schemas.openxmlformats.org/officeDocument/2006/relationships" xmlns:mc="http://schemas.openxmlformats.org/markup-compatibility/2006" xmlns:mv="urn:schemas-microsoft-com:mac:vml" xmlns:p="http://schemas.openxmlformats.org/presentationml/2006/main" xmlns:c="http://schemas.openxmlformats.org/drawingml/2006/chart" xmlns:dgm="http://schemas.openxmlformats.org/drawingml/2006/diagram" xmlns:o="urn:schemas-microsoft-com:office:office" xmlns:v="urn:schemas-microsoft-com:vml" xmlns:pvml="urn:schemas-microsoft-com:office:powerpoint" xmlns:com="http://schemas.openxmlformats.org/drawingml/2006/compatibility" xmlns:p14="http://schemas.microsoft.com/office/powerpoint/2010/main" xmlns:p15="http://schemas.microsoft.com/office/powerpoint/2012/main" xmlns:ahyp="http://schemas.microsoft.com/office/drawing/2018/hyperlinkcolor">
+  <p:cSld>
+    <p:spTree>
+      <p:nvGrpSpPr>
+        <p:cNvPr id="84" name="Shape 84"/>
+        <p:cNvGrpSpPr/>
+        <p:nvPr/>
+      </p:nvGrpSpPr>
+      <p:grpSpPr>
+        <a:xfrm>
+          <a:off x="0" y="0"/>
+          <a:ext cx="0" cy="0"/>
+          <a:chOff x="0" y="0"/>
+          <a:chExt cx="0" cy="0"/>
+        </a:xfrm>
+      </p:grpSpPr>
+      <p:sp>
+        <p:nvSpPr>
+          <p:cNvPr id="85" name="Google Shape;85;p18"/>
+          <p:cNvSpPr txBox="1"/>
+          <p:nvPr>
+            <p:ph type="title"/>
+          </p:nvPr>
+        </p:nvSpPr>
+        <p:spPr>
+          <a:xfrm>
+            <a:off x="311700" y="445025"/>
+            <a:ext cx="8520600" cy="572700"/>
+          </a:xfrm>
+          <a:prstGeom prst="rect">
+            <a:avLst/>
+          </a:prstGeom>
+        </p:spPr>
+        <p:txBody>
+          <a:bodyPr anchorCtr="0" anchor="t" bIns="91425" lIns="91425" spcFirstLastPara="1" rIns="91425" wrap="square" tIns="91425">
             <a:normAutofit fontScale="90000"/>
           </a:bodyPr>
           <a:lstStyle/>
@@ -6344,7 +6537,7 @@
       </p:sp>
       <p:pic>
         <p:nvPicPr>
-          <p:cNvPr id="80" name="Google Shape;80;p17"/>
+          <p:cNvPr id="86" name="Google Shape;86;p18"/>
           <p:cNvPicPr preferRelativeResize="0"/>
           <p:nvPr/>
         </p:nvPicPr>
